--- a/05_presentacion.pptx
+++ b/05_presentacion.pptx
@@ -5436,7 +5436,7 @@
             </a:pPr>
             <a:r>
               <a:rPr lang="es-ES" sz="1200" dirty="0" smtClean="0"/>
-              <a:t>Las condiciones meteorológicas son el tipo de incidencia más frecuente, mientras que los accidentes graves concentran claramente el mayor coste estimado. Esto puede deberse a los altos costos de indemnizaciones en caso de accidentes.</a:t>
+              <a:t>Las condiciones meteorológicas son el tipo de incidencia más frecuente, mientras que los accidentes graves concentran claramente el mayor coste estimado. Los datos no permiten identificar el concepto que explica este coste.</a:t>
             </a:r>
             <a:endParaRPr sz="1000" dirty="0">
               <a:solidFill>
@@ -5704,7 +5704,7 @@
             <a:pPr lvl="0"/>
             <a:r>
               <a:rPr lang="es-ES" sz="1600" dirty="0" smtClean="0"/>
-              <a:t>Los coches eléctricos presentan un mayor costo de mantenimiento por kilometro recorrido.</a:t>
+              <a:t>Los autobuses eléctricos muestran un coste/km ligeramente superior.</a:t>
             </a:r>
             <a:endParaRPr sz="1600" dirty="0">
               <a:solidFill>
@@ -6604,7 +6604,7 @@
             </a:r>
             <a:r>
               <a:rPr lang="es-ES" b="1" dirty="0"/>
-              <a:t>208 días fuera de servicio</a:t>
+              <a:t>208 días en 2024</a:t>
             </a:r>
             <a:r>
               <a:rPr lang="es-ES" dirty="0"/>
